--- a/1-agile/AGILE_unit_3_FINAL_HR.pptx
+++ b/1-agile/AGILE_unit_3_FINAL_HR.pptx
@@ -245,7 +245,7 @@
           <a:p>
             <a:fld id="{906390A9-51F9-42DE-A6C8-0BB1C1D478EC}" type="datetimeFigureOut">
               <a:rPr lang="en-GB" smtClean="0"/>
-              <a:t>13/03/2026</a:t>
+              <a:t>01/04/2026</a:t>
             </a:fld>
             <a:endParaRPr lang="en-GB"/>
           </a:p>
@@ -8724,10 +8724,10 @@
             <p:nvPr userDrawn="1"/>
           </p:nvPicPr>
           <p:blipFill>
-            <a:blip r:embed="rId3">
+            <a:blip>
               <a:extLst>
                 <a:ext uri="{96DAC541-7B7A-43D3-8B79-37D633B846F1}">
-                  <asvg:svgBlip xmlns:asvg="http://schemas.microsoft.com/office/drawing/2016/SVG/main" r:embed="rId4"/>
+                  <asvg:svgBlip xmlns:asvg="http://schemas.microsoft.com/office/drawing/2016/SVG/main" r:embed="rId3"/>
                 </a:ext>
               </a:extLst>
             </a:blip>
@@ -9193,7 +9193,7 @@
           <a:p>
             <a:fld id="{6963B997-549E-41F4-A1E4-B0CF42B49EF1}" type="datetimeFigureOut">
               <a:rPr lang="hr-HR" smtClean="0"/>
-              <a:t>13.3.2026.</a:t>
+              <a:t>01.04.2026.</a:t>
             </a:fld>
             <a:endParaRPr lang="hr-HR"/>
           </a:p>
@@ -17038,15 +17038,7 @@
             </a:r>
             <a:r>
               <a:rPr lang="en-GB" dirty="0"/>
-              <a:t>backlog (2.5 </a:t>
-            </a:r>
-            <a:r>
-              <a:rPr lang="hr-HR" dirty="0"/>
-              <a:t>sata</a:t>
-            </a:r>
-            <a:r>
-              <a:rPr lang="en-GB" dirty="0"/>
-              <a:t>)</a:t>
+              <a:t>backlog</a:t>
             </a:r>
           </a:p>
           <a:p>
@@ -17067,20 +17059,9 @@
             </a:r>
             <a:r>
               <a:rPr lang="hr-HR" dirty="0"/>
-              <a:t> kartica </a:t>
-            </a:r>
-            <a:r>
-              <a:rPr lang="en-GB" dirty="0"/>
-              <a:t>(2.5 </a:t>
-            </a:r>
-            <a:r>
-              <a:rPr lang="hr-HR" dirty="0"/>
-              <a:t>sata</a:t>
-            </a:r>
-            <a:r>
-              <a:rPr lang="en-GB" dirty="0"/>
-              <a:t>)</a:t>
-            </a:r>
+              <a:t> kartica</a:t>
+            </a:r>
+            <a:endParaRPr lang="en-GB" dirty="0"/>
           </a:p>
           <a:p>
             <a:pPr marL="0" indent="0">
@@ -17094,18 +17075,7 @@
               <a:rPr lang="hr-HR" dirty="0"/>
               <a:t>Kako upravljati planiranjem kapaciteta</a:t>
             </a:r>
-            <a:r>
-              <a:rPr lang="en-GB" dirty="0"/>
-              <a:t> (2.5 </a:t>
-            </a:r>
-            <a:r>
-              <a:rPr lang="hr-HR" dirty="0"/>
-              <a:t>sata</a:t>
-            </a:r>
-            <a:r>
-              <a:rPr lang="en-GB" dirty="0"/>
-              <a:t>)</a:t>
-            </a:r>
+            <a:endParaRPr lang="en-GB" dirty="0"/>
           </a:p>
           <a:p>
             <a:pPr marL="0" indent="0">
@@ -17125,20 +17095,13 @@
             </a:r>
             <a:r>
               <a:rPr lang="hr-HR" dirty="0"/>
-              <a:t>: izrada ploče i pisanje kartica</a:t>
-            </a:r>
-            <a:r>
-              <a:rPr lang="en-GB" dirty="0"/>
-              <a:t> (4 </a:t>
-            </a:r>
-            <a:r>
-              <a:rPr lang="hr-HR" dirty="0"/>
-              <a:t>sata</a:t>
-            </a:r>
-            <a:r>
-              <a:rPr lang="en-GB" dirty="0"/>
-              <a:t>)</a:t>
-            </a:r>
+              <a:t>: izrada ploče i </a:t>
+            </a:r>
+            <a:r>
+              <a:rPr lang="hr-HR"/>
+              <a:t>pisanje kartica</a:t>
+            </a:r>
+            <a:endParaRPr lang="en-GB" dirty="0"/>
           </a:p>
           <a:p>
             <a:pPr marL="0" indent="0">
